--- a/docs/slides/11-slides-ky-thuat.pptx
+++ b/docs/slides/11-slides-ky-thuat.pptx
@@ -47577,7 +47577,7 @@
                       </a:pPr>
                       <a:r>
                         <a:rPr b="1"/>
-                        <a:t>1.000/1.001</a:t>
+                        <a:t>1.001/1.002</a:t>
                       </a:r>
                       <a:r>
                         <a:rPr/>

--- a/docs/slides/11-slides-ky-thuat.pptx
+++ b/docs/slides/11-slides-ky-thuat.pptx
@@ -46416,12 +46416,8 @@
                         <a:buNone/>
                       </a:pPr>
                       <a:r>
-                        <a:rPr/>
-                        <a:t>~12 giờ </a:t>
-                      </a:r>
-                      <a:r>
                         <a:rPr b="1"/>
-                        <a:t>CPU</a:t>
+                        <a:t>10,05 giờ CPU</a:t>
                       </a:r>
                     </a:p>
                   </a:txBody>

--- a/docs/slides/11-slides-ky-thuat.pptx
+++ b/docs/slides/11-slides-ky-thuat.pptx
@@ -7023,7 +7023,7 @@
         <p:spPr>
           <a:xfrm>
             <a:off x="771525" y="1066800"/>
-            <a:ext cx="10582275" cy="1066800"/>
+            <a:ext cx="10582275" cy="1181100"/>
           </a:xfrm>
           <a:prstGeom prst="rect">
             <a:avLst/>
@@ -9591,8 +9591,8 @@
         </p:nvSpPr>
         <p:spPr>
           <a:xfrm>
-            <a:off x="771525" y="2209800"/>
-            <a:ext cx="10582275" cy="3962400"/>
+            <a:off x="771525" y="2324100"/>
+            <a:ext cx="10582275" cy="3848100"/>
           </a:xfrm>
           <a:prstGeom prst="roundRect">
             <a:avLst>
@@ -45330,8 +45330,8 @@
           </p:nvPr>
         </p:nvGraphicFramePr>
         <p:xfrm>
-          <a:off x="762000" y="2209800"/>
-          <a:ext cx="10579100" cy="3962400"/>
+          <a:off x="762000" y="2324100"/>
+          <a:ext cx="10579100" cy="3848100"/>
         </p:xfrm>
         <a:graphic>
           <a:graphicData uri="http://schemas.openxmlformats.org/drawingml/2006/table">
@@ -45925,8 +45925,8 @@
         </p:blipFill>
         <p:spPr bwMode="auto">
           <a:xfrm>
-            <a:off x="3390900" y="2209800"/>
-            <a:ext cx="5334000" cy="3962400"/>
+            <a:off x="3467100" y="2324100"/>
+            <a:ext cx="5168900" cy="3848100"/>
           </a:xfrm>
           <a:prstGeom prst="rect">
             <a:avLst/>
@@ -46226,8 +46226,8 @@
           </p:nvPr>
         </p:nvGraphicFramePr>
         <p:xfrm>
-          <a:off x="762000" y="2209800"/>
-          <a:ext cx="10579100" cy="3962400"/>
+          <a:off x="762000" y="2324100"/>
+          <a:ext cx="10579100" cy="3848100"/>
         </p:xfrm>
         <a:graphic>
           <a:graphicData uri="http://schemas.openxmlformats.org/drawingml/2006/table">
@@ -46767,8 +46767,8 @@
         </p:blipFill>
         <p:spPr bwMode="auto">
           <a:xfrm>
-            <a:off x="3683000" y="2209800"/>
-            <a:ext cx="4737100" cy="3962400"/>
+            <a:off x="3746500" y="2324100"/>
+            <a:ext cx="4610100" cy="3848100"/>
           </a:xfrm>
           <a:prstGeom prst="rect">
             <a:avLst/>
@@ -47076,8 +47076,8 @@
           </p:nvPr>
         </p:nvGraphicFramePr>
         <p:xfrm>
-          <a:off x="762000" y="2209800"/>
-          <a:ext cx="10579100" cy="3962400"/>
+          <a:off x="762000" y="2324100"/>
+          <a:ext cx="10579100" cy="3848100"/>
         </p:xfrm>
         <a:graphic>
           <a:graphicData uri="http://schemas.openxmlformats.org/drawingml/2006/table">
@@ -47901,8 +47901,8 @@
         </p:blipFill>
         <p:spPr bwMode="auto">
           <a:xfrm>
-            <a:off x="2882900" y="2209800"/>
-            <a:ext cx="6337300" cy="3962400"/>
+            <a:off x="2971800" y="2324100"/>
+            <a:ext cx="6159500" cy="3848100"/>
           </a:xfrm>
           <a:prstGeom prst="rect">
             <a:avLst/>

--- a/docs/slides/11-slides-ky-thuat.pptx
+++ b/docs/slides/11-slides-ky-thuat.pptx
@@ -44678,14 +44678,14 @@
             </a:r>
             <a:r>
               <a:rPr/>
-              <a:t> — bác bỏ tài liệu công khai vốn nghiêng về EasyOCR</a:t>
+              <a:t> trong cấu hình đánh giá của đồ án; kết quả khác với khuynh hướng của một số tài liệu công khai</a:t>
             </a:r>
           </a:p>
           <a:p>
             <a:pPr lvl="0"/>
             <a:r>
               <a:rPr/>
-              <a:t>Nói thẳng phần chưa đạt: đọc đúng cả chuỗi </a:t>
+              <a:t>Đọc đúng cả chuỗi </a:t>
             </a:r>
             <a:r>
               <a:rPr b="1"/>
@@ -44693,7 +44693,7 @@
             </a:r>
             <a:r>
               <a:rPr/>
-              <a:t> so với ngưỡng 0,85</a:t>
+              <a:t>, dưới ngưỡng 0,85</a:t>
             </a:r>
           </a:p>
           <a:p>

--- a/docs/slides/11-slides-ky-thuat.pptx
+++ b/docs/slides/11-slides-ky-thuat.pptx
@@ -47573,7 +47573,7 @@
                       </a:pPr>
                       <a:r>
                         <a:rPr b="1"/>
-                        <a:t>1.001/1.002</a:t>
+                        <a:t>1.002/1.002</a:t>
                       </a:r>
                       <a:r>
                         <a:rPr/>

--- a/docs/slides/11-slides-ky-thuat.pptx
+++ b/docs/slides/11-slides-ky-thuat.pptx
@@ -44651,7 +44651,7 @@
             </a:r>
             <a:r>
               <a:rPr b="1"/>
-              <a:t>+11,39 điểm</a:t>
+              <a:t>+13,28 điểm</a:t>
             </a:r>
             <a:r>
               <a:rPr/>
@@ -44689,7 +44689,7 @@
             </a:r>
             <a:r>
               <a:rPr b="1"/>
-              <a:t>0,7512</a:t>
+              <a:t>0,7701</a:t>
             </a:r>
             <a:r>
               <a:rPr/>
@@ -47056,7 +47056,7 @@
             </a:r>
             <a:r>
               <a:rPr b="1"/>
-              <a:t>25,45 điểm</a:t>
+              <a:t>23,07 điểm</a:t>
             </a:r>
             <a:r>
               <a:rPr/>
@@ -47305,7 +47305,7 @@
                       </a:pPr>
                       <a:r>
                         <a:rPr b="1"/>
-                        <a:t>0,9454</a:t>
+                        <a:t>0,9483</a:t>
                       </a:r>
                     </a:p>
                   </a:txBody>
@@ -47367,7 +47367,7 @@
                       </a:pPr>
                       <a:r>
                         <a:rPr b="1"/>
-                        <a:t>0,7512</a:t>
+                        <a:t>0,7701</a:t>
                       </a:r>
                     </a:p>
                   </a:txBody>
@@ -47499,11 +47499,11 @@
                       </a:pPr>
                       <a:r>
                         <a:rPr b="1"/>
-                        <a:t>+11,39 điểm</a:t>
+                        <a:t>+13,28 điểm</a:t>
                       </a:r>
                       <a:r>
                         <a:rPr/>
-                        <a:t> · 319 sửa đúng / </a:t>
+                        <a:t> · 372 sửa đúng / </a:t>
                       </a:r>
                       <a:r>
                         <a:rPr b="1"/>

--- a/docs/slides/11-slides-ky-thuat.pptx
+++ b/docs/slides/11-slides-ky-thuat.pptx
@@ -44670,7 +44670,25 @@
             <a:pPr lvl="0"/>
             <a:r>
               <a:rPr/>
-              <a:t>Benchmark ba engine OCR trên biển Việt Nam: PaddleOCR </a:t>
+              <a:t>Benchmark ba engine OCR trên bộ đo riêng của đồ án </a:t>
+            </a:r>
+            <a:r>
+              <a:rPr i="1"/>
+              <a:t>(chi tiết: </a:t>
+            </a:r>
+            <a:r>
+              <a:rPr i="1">
+                <a:latin typeface="Courier"/>
+              </a:rPr>
+              <a:t>36-engine-benchmark</a:t>
+            </a:r>
+            <a:r>
+              <a:rPr i="1"/>
+              <a:t>)</a:t>
+            </a:r>
+            <a:r>
+              <a:rPr/>
+              <a:t>: PaddleOCR </a:t>
             </a:r>
             <a:r>
               <a:rPr b="1"/>
@@ -44678,7 +44696,7 @@
             </a:r>
             <a:r>
               <a:rPr/>
-              <a:t> trong cấu hình đánh giá của đồ án; kết quả khác với khuynh hướng của một số tài liệu công khai</a:t>
+              <a:t>, hơn EasyOCR 54,59 điểm; kết quả khác với khuynh hướng của một số tài liệu công khai</a:t>
             </a:r>
           </a:p>
           <a:p>

--- a/docs/slides/11-slides-ky-thuat.pptx
+++ b/docs/slides/11-slides-ky-thuat.pptx
@@ -44628,15 +44628,7 @@
             <a:pPr lvl="0"/>
             <a:r>
               <a:rPr/>
-              <a:t>Chạy đầu-cuối trên máy </a:t>
-            </a:r>
-            <a:r>
-              <a:rPr b="1"/>
-              <a:t>không có GPU</a:t>
-            </a:r>
-            <a:r>
-              <a:rPr/>
-              <a:t>: bộ phát hiện </a:t>
+              <a:t>Chạy đầu-cuối trên CPU: phát hiện </a:t>
             </a:r>
             <a:r>
               <a:rPr b="1"/>
@@ -44647,7 +44639,7 @@
             <a:pPr lvl="0"/>
             <a:r>
               <a:rPr/>
-              <a:t>Hậu xử lý đóng góp </a:t>
+              <a:t>Hậu xử lý </a:t>
             </a:r>
             <a:r>
               <a:rPr b="1"/>
@@ -44663,18 +44655,18 @@
             </a:r>
             <a:r>
               <a:rPr/>
-              <a:t> trên 2.801 biển</a:t>
+              <a:t> / 2.801 biển</a:t>
             </a:r>
           </a:p>
           <a:p>
             <a:pPr lvl="0"/>
             <a:r>
               <a:rPr/>
-              <a:t>Benchmark ba engine OCR trên bộ đo riêng của đồ án </a:t>
+              <a:t>Ba engine OCR đo trên cùng một tầng </a:t>
             </a:r>
             <a:r>
               <a:rPr i="1"/>
-              <a:t>(chi tiết: </a:t>
+              <a:t>(</a:t>
             </a:r>
             <a:r>
               <a:rPr i="1">
@@ -44703,7 +44695,7 @@
             <a:pPr lvl="0"/>
             <a:r>
               <a:rPr/>
-              <a:t>Đọc đúng cả chuỗi </a:t>
+              <a:t>Chưa đạt: đọc đúng cả chuỗi </a:t>
             </a:r>
             <a:r>
               <a:rPr b="1"/>
@@ -44711,7 +44703,7 @@
             </a:r>
             <a:r>
               <a:rPr/>
-              <a:t>, dưới ngưỡng 0,85</a:t>
+              <a:t> so với ngưỡng 0,85</a:t>
             </a:r>
           </a:p>
           <a:p>
